--- a/Room_Migration_Progress_Clean.pptx
+++ b/Room_Migration_Progress_Clean.pptx
@@ -3215,7 +3215,7 @@
                 </a:solidFill>
                 <a:latin typeface="Arial"/>
               </a:rPr>
-              <a:t>July 13 - July 27</a:t>
+              <a:t>July 13 - August 3</a:t>
             </a:r>
           </a:p>
         </p:txBody>
@@ -3281,7 +3281,7 @@
                 </a:solidFill>
                 <a:latin typeface="Arial"/>
               </a:rPr>
-              <a:t>2,876</a:t>
+              <a:t>4,395</a:t>
             </a:r>
           </a:p>
         </p:txBody>
@@ -3347,7 +3347,7 @@
                 </a:solidFill>
                 <a:latin typeface="Arial"/>
               </a:rPr>
-              <a:t>161</a:t>
+              <a:t>214</a:t>
             </a:r>
           </a:p>
         </p:txBody>
@@ -3413,7 +3413,7 @@
                 </a:solidFill>
                 <a:latin typeface="Arial"/>
               </a:rPr>
-              <a:t>2,715</a:t>
+              <a:t>4,181</a:t>
             </a:r>
           </a:p>
         </p:txBody>
